--- a/Slides/Semana 5/semana_5_slides.pptx
+++ b/Slides/Semana 5/semana_5_slides.pptx
@@ -1319,7 +1319,15 @@
           <a:p>
             <a:r>
               <a:rPr lang="en-US" dirty="0"/>
-              <a:t/>
+              <a:t>FIGURA A PRODUZIR (nota do apresentador — não aparece no slide)
+Objetivo didático:
+Mostrar visualmente a malha gerada pelo bake e seu recuo em relação às paredes da cena de teste.
+Arquivo sugerido:
+assets/navmesh-bake-cena-teste.webp
+Descrição:
+Captura de tela do editor Unity com a NavMesh (área azul) sobreposta à cena de teste (salas, corredor, obstáculos), evidenciando o recuo da malha em relação às paredes.
+Como produzir:
+Screenshot direto do editor Unity durante a demonstração ao vivo, com a malha visível (gizmo do NavMesh Surface ativado).</a:t>
             </a:r>
             <a:endParaRPr lang="en-US" dirty="0"/>
           </a:p>
